--- a/images/Cropping.pptx
+++ b/images/Cropping.pptx
@@ -262,7 +262,7 @@
           <a:p>
             <a:fld id="{CB1473FC-5F2B-43C2-AB6C-EC6B8D04FE99}" type="datetimeFigureOut">
               <a:rPr lang="en-GB" smtClean="0"/>
-              <a:t>16/06/2025</a:t>
+              <a:t>01/10/2025</a:t>
             </a:fld>
             <a:endParaRPr lang="en-GB"/>
           </a:p>
@@ -462,7 +462,7 @@
           <a:p>
             <a:fld id="{CB1473FC-5F2B-43C2-AB6C-EC6B8D04FE99}" type="datetimeFigureOut">
               <a:rPr lang="en-GB" smtClean="0"/>
-              <a:t>16/06/2025</a:t>
+              <a:t>01/10/2025</a:t>
             </a:fld>
             <a:endParaRPr lang="en-GB"/>
           </a:p>
@@ -672,7 +672,7 @@
           <a:p>
             <a:fld id="{CB1473FC-5F2B-43C2-AB6C-EC6B8D04FE99}" type="datetimeFigureOut">
               <a:rPr lang="en-GB" smtClean="0"/>
-              <a:t>16/06/2025</a:t>
+              <a:t>01/10/2025</a:t>
             </a:fld>
             <a:endParaRPr lang="en-GB"/>
           </a:p>
@@ -872,7 +872,7 @@
           <a:p>
             <a:fld id="{CB1473FC-5F2B-43C2-AB6C-EC6B8D04FE99}" type="datetimeFigureOut">
               <a:rPr lang="en-GB" smtClean="0"/>
-              <a:t>16/06/2025</a:t>
+              <a:t>01/10/2025</a:t>
             </a:fld>
             <a:endParaRPr lang="en-GB"/>
           </a:p>
@@ -1148,7 +1148,7 @@
           <a:p>
             <a:fld id="{CB1473FC-5F2B-43C2-AB6C-EC6B8D04FE99}" type="datetimeFigureOut">
               <a:rPr lang="en-GB" smtClean="0"/>
-              <a:t>16/06/2025</a:t>
+              <a:t>01/10/2025</a:t>
             </a:fld>
             <a:endParaRPr lang="en-GB"/>
           </a:p>
@@ -1416,7 +1416,7 @@
           <a:p>
             <a:fld id="{CB1473FC-5F2B-43C2-AB6C-EC6B8D04FE99}" type="datetimeFigureOut">
               <a:rPr lang="en-GB" smtClean="0"/>
-              <a:t>16/06/2025</a:t>
+              <a:t>01/10/2025</a:t>
             </a:fld>
             <a:endParaRPr lang="en-GB"/>
           </a:p>
@@ -1831,7 +1831,7 @@
           <a:p>
             <a:fld id="{CB1473FC-5F2B-43C2-AB6C-EC6B8D04FE99}" type="datetimeFigureOut">
               <a:rPr lang="en-GB" smtClean="0"/>
-              <a:t>16/06/2025</a:t>
+              <a:t>01/10/2025</a:t>
             </a:fld>
             <a:endParaRPr lang="en-GB"/>
           </a:p>
@@ -1973,7 +1973,7 @@
           <a:p>
             <a:fld id="{CB1473FC-5F2B-43C2-AB6C-EC6B8D04FE99}" type="datetimeFigureOut">
               <a:rPr lang="en-GB" smtClean="0"/>
-              <a:t>16/06/2025</a:t>
+              <a:t>01/10/2025</a:t>
             </a:fld>
             <a:endParaRPr lang="en-GB"/>
           </a:p>
@@ -2086,7 +2086,7 @@
           <a:p>
             <a:fld id="{CB1473FC-5F2B-43C2-AB6C-EC6B8D04FE99}" type="datetimeFigureOut">
               <a:rPr lang="en-GB" smtClean="0"/>
-              <a:t>16/06/2025</a:t>
+              <a:t>01/10/2025</a:t>
             </a:fld>
             <a:endParaRPr lang="en-GB"/>
           </a:p>
@@ -2399,7 +2399,7 @@
           <a:p>
             <a:fld id="{CB1473FC-5F2B-43C2-AB6C-EC6B8D04FE99}" type="datetimeFigureOut">
               <a:rPr lang="en-GB" smtClean="0"/>
-              <a:t>16/06/2025</a:t>
+              <a:t>01/10/2025</a:t>
             </a:fld>
             <a:endParaRPr lang="en-GB"/>
           </a:p>
@@ -2688,7 +2688,7 @@
           <a:p>
             <a:fld id="{CB1473FC-5F2B-43C2-AB6C-EC6B8D04FE99}" type="datetimeFigureOut">
               <a:rPr lang="en-GB" smtClean="0"/>
-              <a:t>16/06/2025</a:t>
+              <a:t>01/10/2025</a:t>
             </a:fld>
             <a:endParaRPr lang="en-GB"/>
           </a:p>
@@ -2931,7 +2931,7 @@
           <a:p>
             <a:fld id="{CB1473FC-5F2B-43C2-AB6C-EC6B8D04FE99}" type="datetimeFigureOut">
               <a:rPr lang="en-GB" smtClean="0"/>
-              <a:t>16/06/2025</a:t>
+              <a:t>01/10/2025</a:t>
             </a:fld>
             <a:endParaRPr lang="en-GB"/>
           </a:p>
@@ -3597,41 +3597,6 @@
           </a:p>
         </p:txBody>
       </p:sp>
-      <p:pic>
-        <p:nvPicPr>
-          <p:cNvPr id="3" name="Picture 2">
-            <a:extLst>
-              <a:ext uri="{FF2B5EF4-FFF2-40B4-BE49-F238E27FC236}">
-                <a16:creationId xmlns:a16="http://schemas.microsoft.com/office/drawing/2014/main" id="{40462566-EC64-408A-8960-1A739AB89EE6}"/>
-              </a:ext>
-            </a:extLst>
-          </p:cNvPr>
-          <p:cNvPicPr>
-            <a:picLocks noChangeAspect="1"/>
-          </p:cNvPicPr>
-          <p:nvPr/>
-        </p:nvPicPr>
-        <p:blipFill rotWithShape="1">
-          <a:blip r:embed="rId4">
-            <a:extLst>
-              <a:ext uri="{28A0092B-C50C-407E-A947-70E740481C1C}">
-                <a14:useLocalDpi xmlns:a14="http://schemas.microsoft.com/office/drawing/2010/main" val="0"/>
-              </a:ext>
-            </a:extLst>
-          </a:blip>
-          <a:srcRect t="820" b="820"/>
-          <a:stretch/>
-        </p:blipFill>
-        <p:spPr>
-          <a:xfrm>
-            <a:off x="12092441" y="-1852488"/>
-            <a:ext cx="4762500" cy="2857500"/>
-          </a:xfrm>
-          <a:prstGeom prst="rect">
-            <a:avLst/>
-          </a:prstGeom>
-        </p:spPr>
-      </p:pic>
       <p:sp>
         <p:nvSpPr>
           <p:cNvPr id="8" name="Rectangle 7">
@@ -3699,7 +3664,7 @@
           <p:nvPr/>
         </p:nvPicPr>
         <p:blipFill>
-          <a:blip r:embed="rId5" cstate="print">
+          <a:blip r:embed="rId4" cstate="print">
             <a:extLst>
               <a:ext uri="{28A0092B-C50C-407E-A947-70E740481C1C}">
                 <a14:useLocalDpi xmlns:a14="http://schemas.microsoft.com/office/drawing/2010/main" val="0"/>
@@ -3740,7 +3705,7 @@
           <p:nvPr/>
         </p:nvPicPr>
         <p:blipFill rotWithShape="1">
-          <a:blip r:embed="rId6" cstate="hqprint">
+          <a:blip r:embed="rId5" cstate="hqprint">
             <a:extLst>
               <a:ext uri="{28A0092B-C50C-407E-A947-70E740481C1C}">
                 <a14:useLocalDpi xmlns:a14="http://schemas.microsoft.com/office/drawing/2010/main"/>
@@ -3857,7 +3822,7 @@
               <a:avLst/>
             </a:prstGeom>
             <a:blipFill dpi="0" rotWithShape="1">
-              <a:blip r:embed="rId7">
+              <a:blip r:embed="rId6">
                 <a:alphaModFix amt="24000"/>
               </a:blip>
               <a:srcRect/>
@@ -3961,7 +3926,7 @@
             <p:nvPr/>
           </p:nvPicPr>
           <p:blipFill>
-            <a:blip r:embed="rId8">
+            <a:blip r:embed="rId7">
               <a:clrChange>
                 <a:clrFrom>
                   <a:srgbClr val="FEFEFE"/>
@@ -4076,7 +4041,7 @@
           <p:nvPr/>
         </p:nvPicPr>
         <p:blipFill rotWithShape="1">
-          <a:blip r:embed="rId9"/>
+          <a:blip r:embed="rId8"/>
           <a:srcRect l="23645" t="33957" r="8704" b="-20"/>
           <a:stretch>
             <a:fillRect/>
@@ -4097,87 +4062,6 @@
           </a:ln>
         </p:spPr>
       </p:pic>
-      <p:grpSp>
-        <p:nvGrpSpPr>
-          <p:cNvPr id="33" name="Group 32">
-            <a:extLst>
-              <a:ext uri="{FF2B5EF4-FFF2-40B4-BE49-F238E27FC236}">
-                <a16:creationId xmlns:a16="http://schemas.microsoft.com/office/drawing/2014/main" id="{32F604F3-FB43-9016-4801-700F4357713A}"/>
-              </a:ext>
-            </a:extLst>
-          </p:cNvPr>
-          <p:cNvGrpSpPr/>
-          <p:nvPr/>
-        </p:nvGrpSpPr>
-        <p:grpSpPr>
-          <a:xfrm>
-            <a:off x="-2122527" y="533935"/>
-            <a:ext cx="2075518" cy="2081946"/>
-            <a:chOff x="4557498" y="1885734"/>
-            <a:chExt cx="3077004" cy="3086531"/>
-          </a:xfrm>
-        </p:grpSpPr>
-        <p:pic>
-          <p:nvPicPr>
-            <p:cNvPr id="30" name="Picture 29">
-              <a:extLst>
-                <a:ext uri="{FF2B5EF4-FFF2-40B4-BE49-F238E27FC236}">
-                  <a16:creationId xmlns:a16="http://schemas.microsoft.com/office/drawing/2014/main" id="{CA311734-F98A-13FB-450F-9A6F195909F8}"/>
-                </a:ext>
-              </a:extLst>
-            </p:cNvPr>
-            <p:cNvPicPr>
-              <a:picLocks noChangeAspect="1"/>
-            </p:cNvPicPr>
-            <p:nvPr/>
-          </p:nvPicPr>
-          <p:blipFill>
-            <a:blip r:embed="rId10"/>
-            <a:stretch>
-              <a:fillRect/>
-            </a:stretch>
-          </p:blipFill>
-          <p:spPr>
-            <a:xfrm>
-              <a:off x="4557498" y="1885734"/>
-              <a:ext cx="3077004" cy="3086531"/>
-            </a:xfrm>
-            <a:prstGeom prst="rect">
-              <a:avLst/>
-            </a:prstGeom>
-          </p:spPr>
-        </p:pic>
-        <p:pic>
-          <p:nvPicPr>
-            <p:cNvPr id="32" name="Picture 31">
-              <a:extLst>
-                <a:ext uri="{FF2B5EF4-FFF2-40B4-BE49-F238E27FC236}">
-                  <a16:creationId xmlns:a16="http://schemas.microsoft.com/office/drawing/2014/main" id="{002EC23E-564B-F7DB-803C-3F1524F31148}"/>
-                </a:ext>
-              </a:extLst>
-            </p:cNvPr>
-            <p:cNvPicPr>
-              <a:picLocks noChangeAspect="1"/>
-            </p:cNvPicPr>
-            <p:nvPr/>
-          </p:nvPicPr>
-          <p:blipFill>
-            <a:blip r:embed="rId11"/>
-            <a:stretch>
-              <a:fillRect/>
-            </a:stretch>
-          </p:blipFill>
-          <p:spPr>
-            <a:xfrm>
-              <a:off x="4558598" y="1885735"/>
-              <a:ext cx="1027540" cy="1011230"/>
-            </a:xfrm>
-            <a:prstGeom prst="rect">
-              <a:avLst/>
-            </a:prstGeom>
-          </p:spPr>
-        </p:pic>
-      </p:grpSp>
       <p:sp>
         <p:nvSpPr>
           <p:cNvPr id="28" name="Rectangle 27">
@@ -4230,6 +4114,43 @@
           </a:p>
         </p:txBody>
       </p:sp>
+      <p:pic>
+        <p:nvPicPr>
+          <p:cNvPr id="15" name="Picture 14" descr="A group of men sitting in a room&#10;&#10;AI-generated content may be incorrect.">
+            <a:extLst>
+              <a:ext uri="{FF2B5EF4-FFF2-40B4-BE49-F238E27FC236}">
+                <a16:creationId xmlns:a16="http://schemas.microsoft.com/office/drawing/2014/main" id="{C288D81C-2F36-2B56-2784-A894ECF21B9F}"/>
+              </a:ext>
+            </a:extLst>
+          </p:cNvPr>
+          <p:cNvPicPr>
+            <a:picLocks noChangeAspect="1"/>
+          </p:cNvPicPr>
+          <p:nvPr/>
+        </p:nvPicPr>
+        <p:blipFill rotWithShape="1">
+          <a:blip r:embed="rId9">
+            <a:extLst>
+              <a:ext uri="{28A0092B-C50C-407E-A947-70E740481C1C}">
+                <a14:useLocalDpi xmlns:a14="http://schemas.microsoft.com/office/drawing/2010/main" val="0"/>
+              </a:ext>
+            </a:extLst>
+          </a:blip>
+          <a:srcRect t="12953" b="7047"/>
+          <a:stretch>
+            <a:fillRect/>
+          </a:stretch>
+        </p:blipFill>
+        <p:spPr>
+          <a:xfrm>
+            <a:off x="3774962" y="4195297"/>
+            <a:ext cx="5852160" cy="3511296"/>
+          </a:xfrm>
+          <a:prstGeom prst="rect">
+            <a:avLst/>
+          </a:prstGeom>
+        </p:spPr>
+      </p:pic>
     </p:spTree>
     <p:extLst>
       <p:ext uri="{BB962C8B-B14F-4D97-AF65-F5344CB8AC3E}">
@@ -4470,6 +4391,43 @@
           <a:xfrm>
             <a:off x="537030" y="1823037"/>
             <a:ext cx="4033558" cy="5378078"/>
+          </a:xfrm>
+          <a:prstGeom prst="rect">
+            <a:avLst/>
+          </a:prstGeom>
+        </p:spPr>
+      </p:pic>
+      <p:pic>
+        <p:nvPicPr>
+          <p:cNvPr id="16" name="Picture 15" descr="A turtle eating a strawberry&#10;&#10;AI-generated content may be incorrect.">
+            <a:extLst>
+              <a:ext uri="{FF2B5EF4-FFF2-40B4-BE49-F238E27FC236}">
+                <a16:creationId xmlns:a16="http://schemas.microsoft.com/office/drawing/2014/main" id="{8643B5D8-350A-54AA-E95A-C94AF0C8380E}"/>
+              </a:ext>
+            </a:extLst>
+          </p:cNvPr>
+          <p:cNvPicPr>
+            <a:picLocks noChangeAspect="1"/>
+          </p:cNvPicPr>
+          <p:nvPr/>
+        </p:nvPicPr>
+        <p:blipFill rotWithShape="1">
+          <a:blip r:embed="rId6">
+            <a:extLst>
+              <a:ext uri="{28A0092B-C50C-407E-A947-70E740481C1C}">
+                <a14:useLocalDpi xmlns:a14="http://schemas.microsoft.com/office/drawing/2010/main" val="0"/>
+              </a:ext>
+            </a:extLst>
+          </a:blip>
+          <a:srcRect l="15192" t="11082" r="42863" b="4976"/>
+          <a:stretch>
+            <a:fillRect/>
+          </a:stretch>
+        </p:blipFill>
+        <p:spPr>
+          <a:xfrm>
+            <a:off x="2443221" y="1224262"/>
+            <a:ext cx="3807618" cy="5076824"/>
           </a:xfrm>
           <a:prstGeom prst="rect">
             <a:avLst/>

--- a/images/Cropping.pptx
+++ b/images/Cropping.pptx
@@ -262,7 +262,7 @@
           <a:p>
             <a:fld id="{CB1473FC-5F2B-43C2-AB6C-EC6B8D04FE99}" type="datetimeFigureOut">
               <a:rPr lang="en-GB" smtClean="0"/>
-              <a:t>01/10/2025</a:t>
+              <a:t>31/10/2025</a:t>
             </a:fld>
             <a:endParaRPr lang="en-GB"/>
           </a:p>
@@ -462,7 +462,7 @@
           <a:p>
             <a:fld id="{CB1473FC-5F2B-43C2-AB6C-EC6B8D04FE99}" type="datetimeFigureOut">
               <a:rPr lang="en-GB" smtClean="0"/>
-              <a:t>01/10/2025</a:t>
+              <a:t>31/10/2025</a:t>
             </a:fld>
             <a:endParaRPr lang="en-GB"/>
           </a:p>
@@ -672,7 +672,7 @@
           <a:p>
             <a:fld id="{CB1473FC-5F2B-43C2-AB6C-EC6B8D04FE99}" type="datetimeFigureOut">
               <a:rPr lang="en-GB" smtClean="0"/>
-              <a:t>01/10/2025</a:t>
+              <a:t>31/10/2025</a:t>
             </a:fld>
             <a:endParaRPr lang="en-GB"/>
           </a:p>
@@ -872,7 +872,7 @@
           <a:p>
             <a:fld id="{CB1473FC-5F2B-43C2-AB6C-EC6B8D04FE99}" type="datetimeFigureOut">
               <a:rPr lang="en-GB" smtClean="0"/>
-              <a:t>01/10/2025</a:t>
+              <a:t>31/10/2025</a:t>
             </a:fld>
             <a:endParaRPr lang="en-GB"/>
           </a:p>
@@ -1148,7 +1148,7 @@
           <a:p>
             <a:fld id="{CB1473FC-5F2B-43C2-AB6C-EC6B8D04FE99}" type="datetimeFigureOut">
               <a:rPr lang="en-GB" smtClean="0"/>
-              <a:t>01/10/2025</a:t>
+              <a:t>31/10/2025</a:t>
             </a:fld>
             <a:endParaRPr lang="en-GB"/>
           </a:p>
@@ -1416,7 +1416,7 @@
           <a:p>
             <a:fld id="{CB1473FC-5F2B-43C2-AB6C-EC6B8D04FE99}" type="datetimeFigureOut">
               <a:rPr lang="en-GB" smtClean="0"/>
-              <a:t>01/10/2025</a:t>
+              <a:t>31/10/2025</a:t>
             </a:fld>
             <a:endParaRPr lang="en-GB"/>
           </a:p>
@@ -1831,7 +1831,7 @@
           <a:p>
             <a:fld id="{CB1473FC-5F2B-43C2-AB6C-EC6B8D04FE99}" type="datetimeFigureOut">
               <a:rPr lang="en-GB" smtClean="0"/>
-              <a:t>01/10/2025</a:t>
+              <a:t>31/10/2025</a:t>
             </a:fld>
             <a:endParaRPr lang="en-GB"/>
           </a:p>
@@ -1973,7 +1973,7 @@
           <a:p>
             <a:fld id="{CB1473FC-5F2B-43C2-AB6C-EC6B8D04FE99}" type="datetimeFigureOut">
               <a:rPr lang="en-GB" smtClean="0"/>
-              <a:t>01/10/2025</a:t>
+              <a:t>31/10/2025</a:t>
             </a:fld>
             <a:endParaRPr lang="en-GB"/>
           </a:p>
@@ -2086,7 +2086,7 @@
           <a:p>
             <a:fld id="{CB1473FC-5F2B-43C2-AB6C-EC6B8D04FE99}" type="datetimeFigureOut">
               <a:rPr lang="en-GB" smtClean="0"/>
-              <a:t>01/10/2025</a:t>
+              <a:t>31/10/2025</a:t>
             </a:fld>
             <a:endParaRPr lang="en-GB"/>
           </a:p>
@@ -2399,7 +2399,7 @@
           <a:p>
             <a:fld id="{CB1473FC-5F2B-43C2-AB6C-EC6B8D04FE99}" type="datetimeFigureOut">
               <a:rPr lang="en-GB" smtClean="0"/>
-              <a:t>01/10/2025</a:t>
+              <a:t>31/10/2025</a:t>
             </a:fld>
             <a:endParaRPr lang="en-GB"/>
           </a:p>
@@ -2688,7 +2688,7 @@
           <a:p>
             <a:fld id="{CB1473FC-5F2B-43C2-AB6C-EC6B8D04FE99}" type="datetimeFigureOut">
               <a:rPr lang="en-GB" smtClean="0"/>
-              <a:t>01/10/2025</a:t>
+              <a:t>31/10/2025</a:t>
             </a:fld>
             <a:endParaRPr lang="en-GB"/>
           </a:p>
@@ -2931,7 +2931,7 @@
           <a:p>
             <a:fld id="{CB1473FC-5F2B-43C2-AB6C-EC6B8D04FE99}" type="datetimeFigureOut">
               <a:rPr lang="en-GB" smtClean="0"/>
-              <a:t>01/10/2025</a:t>
+              <a:t>31/10/2025</a:t>
             </a:fld>
             <a:endParaRPr lang="en-GB"/>
           </a:p>
@@ -3348,6 +3348,58 @@
           <a:chExt cx="0" cy="0"/>
         </a:xfrm>
       </p:grpSpPr>
+      <p:sp>
+        <p:nvSpPr>
+          <p:cNvPr id="3" name="Rectangle 2">
+            <a:extLst>
+              <a:ext uri="{FF2B5EF4-FFF2-40B4-BE49-F238E27FC236}">
+                <a16:creationId xmlns:a16="http://schemas.microsoft.com/office/drawing/2014/main" id="{EC159AB5-AEFB-1E2B-1124-2D0F099E146D}"/>
+              </a:ext>
+            </a:extLst>
+          </p:cNvPr>
+          <p:cNvSpPr/>
+          <p:nvPr/>
+        </p:nvSpPr>
+        <p:spPr>
+          <a:xfrm>
+            <a:off x="-6438900" y="1893422"/>
+            <a:ext cx="6883220" cy="4129934"/>
+          </a:xfrm>
+          <a:prstGeom prst="rect">
+            <a:avLst/>
+          </a:prstGeom>
+          <a:solidFill>
+            <a:schemeClr val="bg1"/>
+          </a:solidFill>
+          <a:ln>
+            <a:noFill/>
+          </a:ln>
+        </p:spPr>
+        <p:style>
+          <a:lnRef idx="2">
+            <a:schemeClr val="accent1">
+              <a:shade val="15000"/>
+            </a:schemeClr>
+          </a:lnRef>
+          <a:fillRef idx="1">
+            <a:schemeClr val="accent1"/>
+          </a:fillRef>
+          <a:effectRef idx="0">
+            <a:schemeClr val="accent1"/>
+          </a:effectRef>
+          <a:fontRef idx="minor">
+            <a:schemeClr val="lt1"/>
+          </a:fontRef>
+        </p:style>
+        <p:txBody>
+          <a:bodyPr rtlCol="0" anchor="ctr"/>
+          <a:lstStyle/>
+          <a:p>
+            <a:pPr algn="ctr"/>
+            <a:endParaRPr lang="en-GB"/>
+          </a:p>
+        </p:txBody>
+      </p:sp>
       <p:pic>
         <p:nvPicPr>
           <p:cNvPr id="27" name="Picture 26">
@@ -3781,251 +3833,233 @@
           </a:p>
         </p:txBody>
       </p:sp>
-      <p:grpSp>
-        <p:nvGrpSpPr>
-          <p:cNvPr id="26" name="Group 25">
-            <a:extLst>
-              <a:ext uri="{FF2B5EF4-FFF2-40B4-BE49-F238E27FC236}">
-                <a16:creationId xmlns:a16="http://schemas.microsoft.com/office/drawing/2014/main" id="{8747582F-B7CB-7172-EE52-44209AC9FE89}"/>
-              </a:ext>
-            </a:extLst>
-          </p:cNvPr>
-          <p:cNvGrpSpPr/>
+      <p:sp>
+        <p:nvSpPr>
+          <p:cNvPr id="12" name="Rectangle 11">
+            <a:extLst>
+              <a:ext uri="{FF2B5EF4-FFF2-40B4-BE49-F238E27FC236}">
+                <a16:creationId xmlns:a16="http://schemas.microsoft.com/office/drawing/2014/main" id="{FFC1017E-4CB9-7533-B47E-98DD4896626C}"/>
+              </a:ext>
+            </a:extLst>
+          </p:cNvPr>
+          <p:cNvSpPr/>
           <p:nvPr/>
-        </p:nvGrpSpPr>
-        <p:grpSpPr>
+        </p:nvSpPr>
+        <p:spPr>
           <a:xfrm>
-            <a:off x="-9776964" y="5436722"/>
+            <a:off x="-6429447" y="1893422"/>
             <a:ext cx="6883220" cy="4129934"/>
-            <a:chOff x="1005336" y="7036922"/>
-            <a:chExt cx="6883220" cy="4129934"/>
           </a:xfrm>
-        </p:grpSpPr>
-        <p:sp>
-          <p:nvSpPr>
-            <p:cNvPr id="12" name="Rectangle 11">
-              <a:extLst>
-                <a:ext uri="{FF2B5EF4-FFF2-40B4-BE49-F238E27FC236}">
-                  <a16:creationId xmlns:a16="http://schemas.microsoft.com/office/drawing/2014/main" id="{FFC1017E-4CB9-7533-B47E-98DD4896626C}"/>
-                </a:ext>
-              </a:extLst>
-            </p:cNvPr>
-            <p:cNvSpPr/>
-            <p:nvPr/>
-          </p:nvSpPr>
-          <p:spPr>
-            <a:xfrm>
-              <a:off x="1005336" y="7036922"/>
-              <a:ext cx="6883220" cy="4129934"/>
-            </a:xfrm>
-            <a:prstGeom prst="rect">
-              <a:avLst/>
-            </a:prstGeom>
-            <a:blipFill dpi="0" rotWithShape="1">
-              <a:blip r:embed="rId6">
-                <a:alphaModFix amt="24000"/>
-              </a:blip>
-              <a:srcRect/>
-              <a:stretch>
-                <a:fillRect/>
-              </a:stretch>
-            </a:blipFill>
-            <a:ln w="28575">
-              <a:noFill/>
-            </a:ln>
-          </p:spPr>
-          <p:style>
-            <a:lnRef idx="2">
-              <a:schemeClr val="accent1">
-                <a:shade val="15000"/>
-              </a:schemeClr>
-            </a:lnRef>
-            <a:fillRef idx="1">
-              <a:schemeClr val="accent1"/>
-            </a:fillRef>
-            <a:effectRef idx="0">
-              <a:schemeClr val="accent1"/>
-            </a:effectRef>
-            <a:fontRef idx="minor">
-              <a:schemeClr val="lt1"/>
-            </a:fontRef>
-          </p:style>
-          <p:txBody>
-            <a:bodyPr rtlCol="0" anchor="ctr"/>
-            <a:lstStyle/>
-            <a:p>
-              <a:pPr algn="ctr"/>
-              <a:endParaRPr lang="en-GB" dirty="0"/>
-            </a:p>
-          </p:txBody>
-        </p:sp>
-        <p:sp>
-          <p:nvSpPr>
-            <p:cNvPr id="17" name="Rectangle 16">
-              <a:extLst>
-                <a:ext uri="{FF2B5EF4-FFF2-40B4-BE49-F238E27FC236}">
-                  <a16:creationId xmlns:a16="http://schemas.microsoft.com/office/drawing/2014/main" id="{D4775323-F252-F11C-2742-9830A848788A}"/>
-                </a:ext>
-              </a:extLst>
-            </p:cNvPr>
-            <p:cNvSpPr/>
-            <p:nvPr/>
-          </p:nvSpPr>
-          <p:spPr>
-            <a:xfrm>
-              <a:off x="1005336" y="7036922"/>
-              <a:ext cx="6883220" cy="4129934"/>
-            </a:xfrm>
-            <a:prstGeom prst="rect">
-              <a:avLst/>
-            </a:prstGeom>
+          <a:prstGeom prst="rect">
+            <a:avLst/>
+          </a:prstGeom>
+          <a:blipFill dpi="0" rotWithShape="1">
+            <a:blip r:embed="rId6">
+              <a:alphaModFix amt="24000"/>
+            </a:blip>
+            <a:srcRect/>
+            <a:stretch>
+              <a:fillRect/>
+            </a:stretch>
+          </a:blipFill>
+          <a:ln w="28575">
             <a:noFill/>
-            <a:ln w="28575">
-              <a:solidFill>
-                <a:schemeClr val="tx1"/>
-              </a:solidFill>
-            </a:ln>
-          </p:spPr>
-          <p:style>
-            <a:lnRef idx="2">
-              <a:schemeClr val="accent1">
-                <a:shade val="15000"/>
-              </a:schemeClr>
-            </a:lnRef>
-            <a:fillRef idx="1">
-              <a:schemeClr val="accent1"/>
-            </a:fillRef>
-            <a:effectRef idx="0">
-              <a:schemeClr val="accent1"/>
-            </a:effectRef>
-            <a:fontRef idx="minor">
-              <a:schemeClr val="lt1"/>
-            </a:fontRef>
-          </p:style>
-          <p:txBody>
-            <a:bodyPr rtlCol="0" anchor="ctr"/>
-            <a:lstStyle/>
-            <a:p>
-              <a:pPr algn="ctr"/>
-              <a:endParaRPr lang="en-GB"/>
-            </a:p>
-          </p:txBody>
-        </p:sp>
-        <p:pic>
-          <p:nvPicPr>
-            <p:cNvPr id="16" name="Picture 15" descr="A person wearing a hat pointing at the camera&#10;&#10;AI-generated content may be incorrect.">
-              <a:extLst>
-                <a:ext uri="{FF2B5EF4-FFF2-40B4-BE49-F238E27FC236}">
-                  <a16:creationId xmlns:a16="http://schemas.microsoft.com/office/drawing/2014/main" id="{230F36D2-CD1C-72C5-7CA4-CBF7B79B227C}"/>
-                </a:ext>
-              </a:extLst>
-            </p:cNvPr>
-            <p:cNvPicPr>
-              <a:picLocks noChangeAspect="1"/>
-            </p:cNvPicPr>
-            <p:nvPr/>
-          </p:nvPicPr>
-          <p:blipFill>
-            <a:blip r:embed="rId7">
-              <a:clrChange>
-                <a:clrFrom>
-                  <a:srgbClr val="FEFEFE"/>
-                </a:clrFrom>
-                <a:clrTo>
-                  <a:srgbClr val="FEFEFE">
-                    <a:alpha val="0"/>
-                  </a:srgbClr>
-                </a:clrTo>
-              </a:clrChange>
-              <a:extLst>
-                <a:ext uri="{28A0092B-C50C-407E-A947-70E740481C1C}">
-                  <a14:useLocalDpi xmlns:a14="http://schemas.microsoft.com/office/drawing/2010/main" val="0"/>
-                </a:ext>
-              </a:extLst>
-            </a:blip>
-            <a:srcRect l="24074" t="12170" r="18845" b="31482"/>
-            <a:stretch/>
-          </p:blipFill>
-          <p:spPr>
-            <a:xfrm>
-              <a:off x="1041425" y="7218118"/>
-              <a:ext cx="3024930" cy="3864356"/>
-            </a:xfrm>
-            <a:prstGeom prst="rect">
-              <a:avLst/>
-            </a:prstGeom>
-          </p:spPr>
-        </p:pic>
-        <p:sp>
-          <p:nvSpPr>
-            <p:cNvPr id="21" name="TextBox 20">
-              <a:extLst>
-                <a:ext uri="{FF2B5EF4-FFF2-40B4-BE49-F238E27FC236}">
-                  <a16:creationId xmlns:a16="http://schemas.microsoft.com/office/drawing/2014/main" id="{C49C2EF7-5711-592E-701F-F1B3013F1DCC}"/>
-                </a:ext>
-              </a:extLst>
-            </p:cNvPr>
-            <p:cNvSpPr txBox="1"/>
-            <p:nvPr/>
-          </p:nvSpPr>
-          <p:spPr>
-            <a:xfrm>
-              <a:off x="4010955" y="7149748"/>
-              <a:ext cx="3664082" cy="4001095"/>
-            </a:xfrm>
-            <a:prstGeom prst="rect">
-              <a:avLst/>
-            </a:prstGeom>
-            <a:noFill/>
-          </p:spPr>
-          <p:txBody>
-            <a:bodyPr wrap="square">
-              <a:spAutoFit/>
-            </a:bodyPr>
-            <a:lstStyle/>
-            <a:p>
-              <a:pPr algn="ctr"/>
-              <a:r>
-                <a:rPr lang="en-US" sz="5400" dirty="0">
-                  <a:solidFill>
-                    <a:srgbClr val="0000BC"/>
-                  </a:solidFill>
-                  <a:latin typeface="Vineta BT" panose="04020906050602070202" pitchFamily="82" charset="0"/>
-                </a:rPr>
-                <a:t>WE WANT </a:t>
-              </a:r>
-              <a:r>
-                <a:rPr lang="en-US" sz="5400" dirty="0">
-                  <a:solidFill>
-                    <a:srgbClr val="C00000"/>
-                  </a:solidFill>
-                  <a:latin typeface="Vineta BT" panose="04020906050602070202" pitchFamily="82" charset="0"/>
-                </a:rPr>
-                <a:t>YOU*</a:t>
-              </a:r>
-            </a:p>
-            <a:p>
-              <a:pPr algn="ctr"/>
-              <a:endParaRPr lang="en-US" sz="2800" dirty="0"/>
-            </a:p>
-            <a:p>
-              <a:pPr algn="ctr"/>
-              <a:r>
-                <a:rPr lang="en-US" sz="3200" dirty="0"/>
-                <a:t>*If you know </a:t>
-              </a:r>
-            </a:p>
-            <a:p>
-              <a:pPr algn="ctr"/>
-              <a:r>
-                <a:rPr lang="en-US" sz="3200" dirty="0"/>
-                <a:t>probe microscopy </a:t>
-              </a:r>
-              <a:endParaRPr lang="en-GB" sz="3200" dirty="0"/>
-            </a:p>
-          </p:txBody>
-        </p:sp>
-      </p:grpSp>
+          </a:ln>
+        </p:spPr>
+        <p:style>
+          <a:lnRef idx="2">
+            <a:schemeClr val="accent1">
+              <a:shade val="15000"/>
+            </a:schemeClr>
+          </a:lnRef>
+          <a:fillRef idx="1">
+            <a:schemeClr val="accent1"/>
+          </a:fillRef>
+          <a:effectRef idx="0">
+            <a:schemeClr val="accent1"/>
+          </a:effectRef>
+          <a:fontRef idx="minor">
+            <a:schemeClr val="lt1"/>
+          </a:fontRef>
+        </p:style>
+        <p:txBody>
+          <a:bodyPr rtlCol="0" anchor="ctr"/>
+          <a:lstStyle/>
+          <a:p>
+            <a:pPr algn="ctr"/>
+            <a:endParaRPr lang="en-GB" dirty="0"/>
+          </a:p>
+        </p:txBody>
+      </p:sp>
+      <p:sp>
+        <p:nvSpPr>
+          <p:cNvPr id="17" name="Rectangle 16">
+            <a:extLst>
+              <a:ext uri="{FF2B5EF4-FFF2-40B4-BE49-F238E27FC236}">
+                <a16:creationId xmlns:a16="http://schemas.microsoft.com/office/drawing/2014/main" id="{D4775323-F252-F11C-2742-9830A848788A}"/>
+              </a:ext>
+            </a:extLst>
+          </p:cNvPr>
+          <p:cNvSpPr/>
+          <p:nvPr/>
+        </p:nvSpPr>
+        <p:spPr>
+          <a:xfrm>
+            <a:off x="-6429447" y="1893422"/>
+            <a:ext cx="6883220" cy="4129934"/>
+          </a:xfrm>
+          <a:prstGeom prst="rect">
+            <a:avLst/>
+          </a:prstGeom>
+          <a:noFill/>
+          <a:ln w="28575">
+            <a:solidFill>
+              <a:schemeClr val="tx1"/>
+            </a:solidFill>
+          </a:ln>
+        </p:spPr>
+        <p:style>
+          <a:lnRef idx="2">
+            <a:schemeClr val="accent1">
+              <a:shade val="15000"/>
+            </a:schemeClr>
+          </a:lnRef>
+          <a:fillRef idx="1">
+            <a:schemeClr val="accent1"/>
+          </a:fillRef>
+          <a:effectRef idx="0">
+            <a:schemeClr val="accent1"/>
+          </a:effectRef>
+          <a:fontRef idx="minor">
+            <a:schemeClr val="lt1"/>
+          </a:fontRef>
+        </p:style>
+        <p:txBody>
+          <a:bodyPr rtlCol="0" anchor="ctr"/>
+          <a:lstStyle/>
+          <a:p>
+            <a:pPr algn="ctr"/>
+            <a:endParaRPr lang="en-GB"/>
+          </a:p>
+        </p:txBody>
+      </p:sp>
+      <p:pic>
+        <p:nvPicPr>
+          <p:cNvPr id="16" name="Picture 15" descr="A person wearing a hat pointing at the camera&#10;&#10;AI-generated content may be incorrect.">
+            <a:extLst>
+              <a:ext uri="{FF2B5EF4-FFF2-40B4-BE49-F238E27FC236}">
+                <a16:creationId xmlns:a16="http://schemas.microsoft.com/office/drawing/2014/main" id="{230F36D2-CD1C-72C5-7CA4-CBF7B79B227C}"/>
+              </a:ext>
+            </a:extLst>
+          </p:cNvPr>
+          <p:cNvPicPr>
+            <a:picLocks noChangeAspect="1"/>
+          </p:cNvPicPr>
+          <p:nvPr/>
+        </p:nvPicPr>
+        <p:blipFill>
+          <a:blip r:embed="rId7">
+            <a:clrChange>
+              <a:clrFrom>
+                <a:srgbClr val="FEFEFE"/>
+              </a:clrFrom>
+              <a:clrTo>
+                <a:srgbClr val="FEFEFE">
+                  <a:alpha val="0"/>
+                </a:srgbClr>
+              </a:clrTo>
+            </a:clrChange>
+            <a:extLst>
+              <a:ext uri="{28A0092B-C50C-407E-A947-70E740481C1C}">
+                <a14:useLocalDpi xmlns:a14="http://schemas.microsoft.com/office/drawing/2010/main" val="0"/>
+              </a:ext>
+            </a:extLst>
+          </a:blip>
+          <a:srcRect l="24074" t="12170" r="18845" b="31482"/>
+          <a:stretch/>
+        </p:blipFill>
+        <p:spPr>
+          <a:xfrm>
+            <a:off x="-6393358" y="2074618"/>
+            <a:ext cx="3024930" cy="3864356"/>
+          </a:xfrm>
+          <a:prstGeom prst="rect">
+            <a:avLst/>
+          </a:prstGeom>
+        </p:spPr>
+      </p:pic>
+      <p:sp>
+        <p:nvSpPr>
+          <p:cNvPr id="21" name="TextBox 20">
+            <a:extLst>
+              <a:ext uri="{FF2B5EF4-FFF2-40B4-BE49-F238E27FC236}">
+                <a16:creationId xmlns:a16="http://schemas.microsoft.com/office/drawing/2014/main" id="{C49C2EF7-5711-592E-701F-F1B3013F1DCC}"/>
+              </a:ext>
+            </a:extLst>
+          </p:cNvPr>
+          <p:cNvSpPr txBox="1"/>
+          <p:nvPr/>
+        </p:nvSpPr>
+        <p:spPr>
+          <a:xfrm>
+            <a:off x="-3423828" y="1930048"/>
+            <a:ext cx="3664082" cy="4062651"/>
+          </a:xfrm>
+          <a:prstGeom prst="rect">
+            <a:avLst/>
+          </a:prstGeom>
+          <a:noFill/>
+        </p:spPr>
+        <p:txBody>
+          <a:bodyPr wrap="square">
+            <a:spAutoFit/>
+          </a:bodyPr>
+          <a:lstStyle/>
+          <a:p>
+            <a:pPr algn="ctr"/>
+            <a:r>
+              <a:rPr lang="en-US" sz="5400" dirty="0">
+                <a:solidFill>
+                  <a:srgbClr val="0000BC"/>
+                </a:solidFill>
+                <a:latin typeface="Vineta BT" panose="04020906050602070202" pitchFamily="82" charset="0"/>
+              </a:rPr>
+              <a:t>WE WANT </a:t>
+            </a:r>
+            <a:r>
+              <a:rPr lang="en-US" sz="5400" dirty="0">
+                <a:solidFill>
+                  <a:srgbClr val="C00000"/>
+                </a:solidFill>
+                <a:latin typeface="Vineta BT" panose="04020906050602070202" pitchFamily="82" charset="0"/>
+              </a:rPr>
+              <a:t>YOU*</a:t>
+            </a:r>
+          </a:p>
+          <a:p>
+            <a:pPr algn="ctr"/>
+            <a:r>
+              <a:rPr lang="en-US" sz="3200" dirty="0"/>
+              <a:t>*to do a PhD on </a:t>
+            </a:r>
+          </a:p>
+          <a:p>
+            <a:pPr algn="ctr"/>
+            <a:r>
+              <a:rPr lang="en-US" sz="3200" dirty="0"/>
+              <a:t>Nanoribbons for </a:t>
+            </a:r>
+          </a:p>
+          <a:p>
+            <a:pPr algn="ctr"/>
+            <a:r>
+              <a:rPr lang="en-US" sz="3200" dirty="0"/>
+              <a:t>Photovoltaics</a:t>
+            </a:r>
+            <a:endParaRPr lang="en-GB" sz="3200" dirty="0"/>
+          </a:p>
+        </p:txBody>
+      </p:sp>
       <p:pic>
         <p:nvPicPr>
           <p:cNvPr id="24" name="Picture 23">
@@ -4114,43 +4148,6 @@
           </a:p>
         </p:txBody>
       </p:sp>
-      <p:pic>
-        <p:nvPicPr>
-          <p:cNvPr id="15" name="Picture 14" descr="A group of men sitting in a room&#10;&#10;AI-generated content may be incorrect.">
-            <a:extLst>
-              <a:ext uri="{FF2B5EF4-FFF2-40B4-BE49-F238E27FC236}">
-                <a16:creationId xmlns:a16="http://schemas.microsoft.com/office/drawing/2014/main" id="{C288D81C-2F36-2B56-2784-A894ECF21B9F}"/>
-              </a:ext>
-            </a:extLst>
-          </p:cNvPr>
-          <p:cNvPicPr>
-            <a:picLocks noChangeAspect="1"/>
-          </p:cNvPicPr>
-          <p:nvPr/>
-        </p:nvPicPr>
-        <p:blipFill rotWithShape="1">
-          <a:blip r:embed="rId9">
-            <a:extLst>
-              <a:ext uri="{28A0092B-C50C-407E-A947-70E740481C1C}">
-                <a14:useLocalDpi xmlns:a14="http://schemas.microsoft.com/office/drawing/2010/main" val="0"/>
-              </a:ext>
-            </a:extLst>
-          </a:blip>
-          <a:srcRect t="12953" b="7047"/>
-          <a:stretch>
-            <a:fillRect/>
-          </a:stretch>
-        </p:blipFill>
-        <p:spPr>
-          <a:xfrm>
-            <a:off x="3774962" y="4195297"/>
-            <a:ext cx="5852160" cy="3511296"/>
-          </a:xfrm>
-          <a:prstGeom prst="rect">
-            <a:avLst/>
-          </a:prstGeom>
-        </p:spPr>
-      </p:pic>
     </p:spTree>
     <p:extLst>
       <p:ext uri="{BB962C8B-B14F-4D97-AF65-F5344CB8AC3E}">

--- a/images/Cropping.pptx
+++ b/images/Cropping.pptx
@@ -262,7 +262,7 @@
           <a:p>
             <a:fld id="{CB1473FC-5F2B-43C2-AB6C-EC6B8D04FE99}" type="datetimeFigureOut">
               <a:rPr lang="en-GB" smtClean="0"/>
-              <a:t>31/10/2025</a:t>
+              <a:t>16/02/2026</a:t>
             </a:fld>
             <a:endParaRPr lang="en-GB"/>
           </a:p>
@@ -462,7 +462,7 @@
           <a:p>
             <a:fld id="{CB1473FC-5F2B-43C2-AB6C-EC6B8D04FE99}" type="datetimeFigureOut">
               <a:rPr lang="en-GB" smtClean="0"/>
-              <a:t>31/10/2025</a:t>
+              <a:t>16/02/2026</a:t>
             </a:fld>
             <a:endParaRPr lang="en-GB"/>
           </a:p>
@@ -672,7 +672,7 @@
           <a:p>
             <a:fld id="{CB1473FC-5F2B-43C2-AB6C-EC6B8D04FE99}" type="datetimeFigureOut">
               <a:rPr lang="en-GB" smtClean="0"/>
-              <a:t>31/10/2025</a:t>
+              <a:t>16/02/2026</a:t>
             </a:fld>
             <a:endParaRPr lang="en-GB"/>
           </a:p>
@@ -872,7 +872,7 @@
           <a:p>
             <a:fld id="{CB1473FC-5F2B-43C2-AB6C-EC6B8D04FE99}" type="datetimeFigureOut">
               <a:rPr lang="en-GB" smtClean="0"/>
-              <a:t>31/10/2025</a:t>
+              <a:t>16/02/2026</a:t>
             </a:fld>
             <a:endParaRPr lang="en-GB"/>
           </a:p>
@@ -1148,7 +1148,7 @@
           <a:p>
             <a:fld id="{CB1473FC-5F2B-43C2-AB6C-EC6B8D04FE99}" type="datetimeFigureOut">
               <a:rPr lang="en-GB" smtClean="0"/>
-              <a:t>31/10/2025</a:t>
+              <a:t>16/02/2026</a:t>
             </a:fld>
             <a:endParaRPr lang="en-GB"/>
           </a:p>
@@ -1416,7 +1416,7 @@
           <a:p>
             <a:fld id="{CB1473FC-5F2B-43C2-AB6C-EC6B8D04FE99}" type="datetimeFigureOut">
               <a:rPr lang="en-GB" smtClean="0"/>
-              <a:t>31/10/2025</a:t>
+              <a:t>16/02/2026</a:t>
             </a:fld>
             <a:endParaRPr lang="en-GB"/>
           </a:p>
@@ -1831,7 +1831,7 @@
           <a:p>
             <a:fld id="{CB1473FC-5F2B-43C2-AB6C-EC6B8D04FE99}" type="datetimeFigureOut">
               <a:rPr lang="en-GB" smtClean="0"/>
-              <a:t>31/10/2025</a:t>
+              <a:t>16/02/2026</a:t>
             </a:fld>
             <a:endParaRPr lang="en-GB"/>
           </a:p>
@@ -1973,7 +1973,7 @@
           <a:p>
             <a:fld id="{CB1473FC-5F2B-43C2-AB6C-EC6B8D04FE99}" type="datetimeFigureOut">
               <a:rPr lang="en-GB" smtClean="0"/>
-              <a:t>31/10/2025</a:t>
+              <a:t>16/02/2026</a:t>
             </a:fld>
             <a:endParaRPr lang="en-GB"/>
           </a:p>
@@ -2086,7 +2086,7 @@
           <a:p>
             <a:fld id="{CB1473FC-5F2B-43C2-AB6C-EC6B8D04FE99}" type="datetimeFigureOut">
               <a:rPr lang="en-GB" smtClean="0"/>
-              <a:t>31/10/2025</a:t>
+              <a:t>16/02/2026</a:t>
             </a:fld>
             <a:endParaRPr lang="en-GB"/>
           </a:p>
@@ -2399,7 +2399,7 @@
           <a:p>
             <a:fld id="{CB1473FC-5F2B-43C2-AB6C-EC6B8D04FE99}" type="datetimeFigureOut">
               <a:rPr lang="en-GB" smtClean="0"/>
-              <a:t>31/10/2025</a:t>
+              <a:t>16/02/2026</a:t>
             </a:fld>
             <a:endParaRPr lang="en-GB"/>
           </a:p>
@@ -2688,7 +2688,7 @@
           <a:p>
             <a:fld id="{CB1473FC-5F2B-43C2-AB6C-EC6B8D04FE99}" type="datetimeFigureOut">
               <a:rPr lang="en-GB" smtClean="0"/>
-              <a:t>31/10/2025</a:t>
+              <a:t>16/02/2026</a:t>
             </a:fld>
             <a:endParaRPr lang="en-GB"/>
           </a:p>
@@ -2931,7 +2931,7 @@
           <a:p>
             <a:fld id="{CB1473FC-5F2B-43C2-AB6C-EC6B8D04FE99}" type="datetimeFigureOut">
               <a:rPr lang="en-GB" smtClean="0"/>
-              <a:t>31/10/2025</a:t>
+              <a:t>16/02/2026</a:t>
             </a:fld>
             <a:endParaRPr lang="en-GB"/>
           </a:p>
@@ -3400,136 +3400,6 @@
           </a:p>
         </p:txBody>
       </p:sp>
-      <p:pic>
-        <p:nvPicPr>
-          <p:cNvPr id="27" name="Picture 26">
-            <a:extLst>
-              <a:ext uri="{FF2B5EF4-FFF2-40B4-BE49-F238E27FC236}">
-                <a16:creationId xmlns:a16="http://schemas.microsoft.com/office/drawing/2014/main" id="{E340C485-3F9E-6BEC-F36D-BE75C5239770}"/>
-              </a:ext>
-            </a:extLst>
-          </p:cNvPr>
-          <p:cNvPicPr>
-            <a:picLocks noChangeAspect="1"/>
-          </p:cNvPicPr>
-          <p:nvPr/>
-        </p:nvPicPr>
-        <p:blipFill>
-          <a:blip r:embed="rId2">
-            <a:clrChange>
-              <a:clrFrom>
-                <a:srgbClr val="FFFFFF"/>
-              </a:clrFrom>
-              <a:clrTo>
-                <a:srgbClr val="FFFFFF">
-                  <a:alpha val="0"/>
-                </a:srgbClr>
-              </a:clrTo>
-            </a:clrChange>
-          </a:blip>
-          <a:srcRect t="986"/>
-          <a:stretch>
-            <a:fillRect/>
-          </a:stretch>
-        </p:blipFill>
-        <p:spPr>
-          <a:xfrm>
-            <a:off x="3071674" y="1747717"/>
-            <a:ext cx="5220070" cy="4102094"/>
-          </a:xfrm>
-          <a:prstGeom prst="rect">
-            <a:avLst/>
-          </a:prstGeom>
-        </p:spPr>
-      </p:pic>
-      <p:pic>
-        <p:nvPicPr>
-          <p:cNvPr id="20" name="Picture 19">
-            <a:extLst>
-              <a:ext uri="{FF2B5EF4-FFF2-40B4-BE49-F238E27FC236}">
-                <a16:creationId xmlns:a16="http://schemas.microsoft.com/office/drawing/2014/main" id="{63D8B8D5-BC81-9191-BF6B-6426378EDCFE}"/>
-              </a:ext>
-            </a:extLst>
-          </p:cNvPr>
-          <p:cNvPicPr>
-            <a:picLocks noChangeAspect="1"/>
-          </p:cNvPicPr>
-          <p:nvPr/>
-        </p:nvPicPr>
-        <p:blipFill rotWithShape="1">
-          <a:blip r:embed="rId3"/>
-          <a:srcRect l="1765" t="62886" r="45025"/>
-          <a:stretch>
-            <a:fillRect/>
-          </a:stretch>
-        </p:blipFill>
-        <p:spPr>
-          <a:xfrm>
-            <a:off x="2169776" y="1747717"/>
-            <a:ext cx="1350000" cy="1800000"/>
-          </a:xfrm>
-          <a:prstGeom prst="rect">
-            <a:avLst/>
-          </a:prstGeom>
-          <a:ln w="19050">
-            <a:solidFill>
-              <a:schemeClr val="tx1"/>
-            </a:solidFill>
-          </a:ln>
-        </p:spPr>
-      </p:pic>
-      <p:sp>
-        <p:nvSpPr>
-          <p:cNvPr id="11" name="Rectangle 10">
-            <a:extLst>
-              <a:ext uri="{FF2B5EF4-FFF2-40B4-BE49-F238E27FC236}">
-                <a16:creationId xmlns:a16="http://schemas.microsoft.com/office/drawing/2014/main" id="{39CE26CF-E037-66C8-F2CE-4D43D049C00A}"/>
-              </a:ext>
-            </a:extLst>
-          </p:cNvPr>
-          <p:cNvSpPr/>
-          <p:nvPr/>
-        </p:nvSpPr>
-        <p:spPr>
-          <a:xfrm>
-            <a:off x="14293518" y="2130330"/>
-            <a:ext cx="6883220" cy="4129934"/>
-          </a:xfrm>
-          <a:prstGeom prst="rect">
-            <a:avLst/>
-          </a:prstGeom>
-          <a:solidFill>
-            <a:schemeClr val="bg1"/>
-          </a:solidFill>
-          <a:ln w="28575">
-            <a:noFill/>
-          </a:ln>
-        </p:spPr>
-        <p:style>
-          <a:lnRef idx="2">
-            <a:schemeClr val="accent1">
-              <a:shade val="15000"/>
-            </a:schemeClr>
-          </a:lnRef>
-          <a:fillRef idx="1">
-            <a:schemeClr val="accent1"/>
-          </a:fillRef>
-          <a:effectRef idx="0">
-            <a:schemeClr val="accent1"/>
-          </a:effectRef>
-          <a:fontRef idx="minor">
-            <a:schemeClr val="lt1"/>
-          </a:fontRef>
-        </p:style>
-        <p:txBody>
-          <a:bodyPr rtlCol="0" anchor="ctr"/>
-          <a:lstStyle/>
-          <a:p>
-            <a:pPr algn="ctr"/>
-            <a:endParaRPr lang="en-GB"/>
-          </a:p>
-        </p:txBody>
-      </p:sp>
       <p:sp>
         <p:nvSpPr>
           <p:cNvPr id="5" name="TextBox 4">
@@ -3651,190 +3521,6 @@
       </p:sp>
       <p:sp>
         <p:nvSpPr>
-          <p:cNvPr id="8" name="Rectangle 7">
-            <a:extLst>
-              <a:ext uri="{FF2B5EF4-FFF2-40B4-BE49-F238E27FC236}">
-                <a16:creationId xmlns:a16="http://schemas.microsoft.com/office/drawing/2014/main" id="{4BB7DD22-20DA-C073-C307-5278B1F8837F}"/>
-              </a:ext>
-            </a:extLst>
-          </p:cNvPr>
-          <p:cNvSpPr/>
-          <p:nvPr/>
-        </p:nvSpPr>
-        <p:spPr>
-          <a:xfrm>
-            <a:off x="14293518" y="2130330"/>
-            <a:ext cx="6883220" cy="4129934"/>
-          </a:xfrm>
-          <a:prstGeom prst="rect">
-            <a:avLst/>
-          </a:prstGeom>
-          <a:noFill/>
-          <a:ln w="28575">
-            <a:solidFill>
-              <a:schemeClr val="tx1"/>
-            </a:solidFill>
-          </a:ln>
-        </p:spPr>
-        <p:style>
-          <a:lnRef idx="2">
-            <a:schemeClr val="accent1">
-              <a:shade val="15000"/>
-            </a:schemeClr>
-          </a:lnRef>
-          <a:fillRef idx="1">
-            <a:schemeClr val="accent1"/>
-          </a:fillRef>
-          <a:effectRef idx="0">
-            <a:schemeClr val="accent1"/>
-          </a:effectRef>
-          <a:fontRef idx="minor">
-            <a:schemeClr val="lt1"/>
-          </a:fontRef>
-        </p:style>
-        <p:txBody>
-          <a:bodyPr rtlCol="0" anchor="ctr"/>
-          <a:lstStyle/>
-          <a:p>
-            <a:pPr algn="ctr"/>
-            <a:endParaRPr lang="en-GB"/>
-          </a:p>
-        </p:txBody>
-      </p:sp>
-      <p:pic>
-        <p:nvPicPr>
-          <p:cNvPr id="2" name="Picture 1" descr="A screenshot of a computer screen&#10;&#10;Description automatically generated">
-            <a:extLst>
-              <a:ext uri="{FF2B5EF4-FFF2-40B4-BE49-F238E27FC236}">
-                <a16:creationId xmlns:a16="http://schemas.microsoft.com/office/drawing/2014/main" id="{F8C5705E-21FE-6C9D-C1B5-771C4E956097}"/>
-              </a:ext>
-            </a:extLst>
-          </p:cNvPr>
-          <p:cNvPicPr>
-            <a:picLocks noChangeAspect="1"/>
-          </p:cNvPicPr>
-          <p:nvPr/>
-        </p:nvPicPr>
-        <p:blipFill>
-          <a:blip r:embed="rId4" cstate="print">
-            <a:extLst>
-              <a:ext uri="{28A0092B-C50C-407E-A947-70E740481C1C}">
-                <a14:useLocalDpi xmlns:a14="http://schemas.microsoft.com/office/drawing/2010/main" val="0"/>
-              </a:ext>
-            </a:extLst>
-          </a:blip>
-          <a:srcRect/>
-          <a:stretch>
-            <a:fillRect/>
-          </a:stretch>
-        </p:blipFill>
-        <p:spPr bwMode="auto">
-          <a:xfrm>
-            <a:off x="14377139" y="2130329"/>
-            <a:ext cx="3078983" cy="4044541"/>
-          </a:xfrm>
-          <a:prstGeom prst="rect">
-            <a:avLst/>
-          </a:prstGeom>
-          <a:noFill/>
-          <a:ln>
-            <a:noFill/>
-          </a:ln>
-        </p:spPr>
-      </p:pic>
-      <p:pic>
-        <p:nvPicPr>
-          <p:cNvPr id="4" name="Picture 3" descr="A picture containing green, screenshot, laser, light&#10;&#10;Description automatically generated">
-            <a:extLst>
-              <a:ext uri="{FF2B5EF4-FFF2-40B4-BE49-F238E27FC236}">
-                <a16:creationId xmlns:a16="http://schemas.microsoft.com/office/drawing/2014/main" id="{77D98B4A-8570-6304-BB21-9CE269D56E83}"/>
-              </a:ext>
-            </a:extLst>
-          </p:cNvPr>
-          <p:cNvPicPr>
-            <a:picLocks noChangeAspect="1"/>
-          </p:cNvPicPr>
-          <p:nvPr/>
-        </p:nvPicPr>
-        <p:blipFill rotWithShape="1">
-          <a:blip r:embed="rId5" cstate="hqprint">
-            <a:extLst>
-              <a:ext uri="{28A0092B-C50C-407E-A947-70E740481C1C}">
-                <a14:useLocalDpi xmlns:a14="http://schemas.microsoft.com/office/drawing/2010/main"/>
-              </a:ext>
-            </a:extLst>
-          </a:blip>
-          <a:srcRect l="38548" t="1061" r="33048"/>
-          <a:stretch/>
-        </p:blipFill>
-        <p:spPr bwMode="auto">
-          <a:xfrm>
-            <a:off x="17459778" y="2491013"/>
-            <a:ext cx="3662363" cy="3532343"/>
-          </a:xfrm>
-          <a:prstGeom prst="rect">
-            <a:avLst/>
-          </a:prstGeom>
-          <a:noFill/>
-          <a:ln>
-            <a:noFill/>
-          </a:ln>
-        </p:spPr>
-      </p:pic>
-      <p:sp>
-        <p:nvSpPr>
-          <p:cNvPr id="9" name="Rectangle 8">
-            <a:extLst>
-              <a:ext uri="{FF2B5EF4-FFF2-40B4-BE49-F238E27FC236}">
-                <a16:creationId xmlns:a16="http://schemas.microsoft.com/office/drawing/2014/main" id="{C11150AC-1E92-02BC-7B55-7ABBA1630691}"/>
-              </a:ext>
-            </a:extLst>
-          </p:cNvPr>
-          <p:cNvSpPr/>
-          <p:nvPr/>
-        </p:nvSpPr>
-        <p:spPr>
-          <a:xfrm>
-            <a:off x="17356365" y="2374900"/>
-            <a:ext cx="252185" cy="317500"/>
-          </a:xfrm>
-          <a:prstGeom prst="rect">
-            <a:avLst/>
-          </a:prstGeom>
-          <a:solidFill>
-            <a:schemeClr val="bg1"/>
-          </a:solidFill>
-          <a:ln>
-            <a:noFill/>
-          </a:ln>
-        </p:spPr>
-        <p:style>
-          <a:lnRef idx="2">
-            <a:schemeClr val="accent1">
-              <a:shade val="15000"/>
-            </a:schemeClr>
-          </a:lnRef>
-          <a:fillRef idx="1">
-            <a:schemeClr val="accent1"/>
-          </a:fillRef>
-          <a:effectRef idx="0">
-            <a:schemeClr val="accent1"/>
-          </a:effectRef>
-          <a:fontRef idx="minor">
-            <a:schemeClr val="lt1"/>
-          </a:fontRef>
-        </p:style>
-        <p:txBody>
-          <a:bodyPr rtlCol="0" anchor="ctr"/>
-          <a:lstStyle/>
-          <a:p>
-            <a:pPr algn="ctr"/>
-            <a:endParaRPr lang="en-GB"/>
-          </a:p>
-        </p:txBody>
-      </p:sp>
-      <p:sp>
-        <p:nvSpPr>
           <p:cNvPr id="12" name="Rectangle 11">
             <a:extLst>
               <a:ext uri="{FF2B5EF4-FFF2-40B4-BE49-F238E27FC236}">
@@ -3854,7 +3540,7 @@
             <a:avLst/>
           </a:prstGeom>
           <a:blipFill dpi="0" rotWithShape="1">
-            <a:blip r:embed="rId6">
+            <a:blip r:embed="rId2">
               <a:alphaModFix amt="24000"/>
             </a:blip>
             <a:srcRect/>
@@ -3958,7 +3644,7 @@
           <p:nvPr/>
         </p:nvPicPr>
         <p:blipFill>
-          <a:blip r:embed="rId7">
+          <a:blip r:embed="rId3">
             <a:clrChange>
               <a:clrFrom>
                 <a:srgbClr val="FEFEFE"/>
@@ -4060,42 +3746,6 @@
           </a:p>
         </p:txBody>
       </p:sp>
-      <p:pic>
-        <p:nvPicPr>
-          <p:cNvPr id="24" name="Picture 23">
-            <a:extLst>
-              <a:ext uri="{FF2B5EF4-FFF2-40B4-BE49-F238E27FC236}">
-                <a16:creationId xmlns:a16="http://schemas.microsoft.com/office/drawing/2014/main" id="{6B80B077-28A6-49D1-5C3E-161023689673}"/>
-              </a:ext>
-            </a:extLst>
-          </p:cNvPr>
-          <p:cNvPicPr>
-            <a:picLocks noChangeAspect="1"/>
-          </p:cNvPicPr>
-          <p:nvPr/>
-        </p:nvPicPr>
-        <p:blipFill rotWithShape="1">
-          <a:blip r:embed="rId8"/>
-          <a:srcRect l="23645" t="33957" r="8704" b="-20"/>
-          <a:stretch>
-            <a:fillRect/>
-          </a:stretch>
-        </p:blipFill>
-        <p:spPr>
-          <a:xfrm>
-            <a:off x="7692958" y="4049811"/>
-            <a:ext cx="1350000" cy="1800000"/>
-          </a:xfrm>
-          <a:prstGeom prst="rect">
-            <a:avLst/>
-          </a:prstGeom>
-          <a:ln w="19050">
-            <a:solidFill>
-              <a:schemeClr val="tx1"/>
-            </a:solidFill>
-          </a:ln>
-        </p:spPr>
-      </p:pic>
       <p:sp>
         <p:nvSpPr>
           <p:cNvPr id="28" name="Rectangle 27">
@@ -4116,7 +3766,9 @@
           <a:prstGeom prst="rect">
             <a:avLst/>
           </a:prstGeom>
-          <a:noFill/>
+          <a:solidFill>
+            <a:schemeClr val="bg1"/>
+          </a:solidFill>
           <a:ln w="28575">
             <a:solidFill>
               <a:schemeClr val="tx1"/>
@@ -4148,6 +3800,36 @@
           </a:p>
         </p:txBody>
       </p:sp>
+      <p:pic>
+        <p:nvPicPr>
+          <p:cNvPr id="18" name="Picture 17">
+            <a:extLst>
+              <a:ext uri="{FF2B5EF4-FFF2-40B4-BE49-F238E27FC236}">
+                <a16:creationId xmlns:a16="http://schemas.microsoft.com/office/drawing/2014/main" id="{3C4BBA86-76F0-2339-35EF-7E844240172B}"/>
+              </a:ext>
+            </a:extLst>
+          </p:cNvPr>
+          <p:cNvPicPr>
+            <a:picLocks noChangeAspect="1"/>
+          </p:cNvPicPr>
+          <p:nvPr/>
+        </p:nvPicPr>
+        <p:blipFill>
+          <a:blip r:embed="rId4"/>
+          <a:stretch>
+            <a:fillRect/>
+          </a:stretch>
+        </p:blipFill>
+        <p:spPr>
+          <a:xfrm>
+            <a:off x="2757849" y="1819432"/>
+            <a:ext cx="5724773" cy="3958217"/>
+          </a:xfrm>
+          <a:prstGeom prst="rect">
+            <a:avLst/>
+          </a:prstGeom>
+        </p:spPr>
+      </p:pic>
     </p:spTree>
     <p:extLst>
       <p:ext uri="{BB962C8B-B14F-4D97-AF65-F5344CB8AC3E}">
